--- a/CKDSurveillance/PPT/Q807.pptx
+++ b/CKDSurveillance/PPT/Q807.pptx
@@ -150,8 +150,280 @@
         <c:grouping val="standard"/>
         <c:varyColors val="0"/>
         <c:ser>
+          <c:idx val="1"/>
+          <c:order val="0"/>
+          <c:tx>
+            <c:strRef>
+              <c:f>CVD!$E$30</c:f>
+              <c:strCache>
+                <c:ptCount val="1"/>
+                <c:pt idx="0">
+                  <c:v>With CKD</c:v>
+                </c:pt>
+              </c:strCache>
+            </c:strRef>
+          </c:tx>
+          <c:spPr>
+            <a:ln w="44450" cap="rnd">
+              <a:solidFill>
+                <a:schemeClr val="accent2"/>
+              </a:solidFill>
+              <a:round/>
+            </a:ln>
+            <a:effectLst/>
+          </c:spPr>
+          <c:marker>
+            <c:symbol val="circle"/>
+            <c:size val="5"/>
+            <c:spPr>
+              <a:solidFill>
+                <a:schemeClr val="accent2"/>
+              </a:solidFill>
+              <a:ln w="9525">
+                <a:solidFill>
+                  <a:schemeClr val="accent2"/>
+                </a:solidFill>
+              </a:ln>
+              <a:effectLst/>
+            </c:spPr>
+          </c:marker>
+          <c:errBars>
+            <c:errDir val="y"/>
+            <c:errBarType val="both"/>
+            <c:errValType val="cust"/>
+            <c:noEndCap val="0"/>
+            <c:plus>
+              <c:numRef>
+                <c:f>CVD!$J$14:$J$18</c:f>
+                <c:numCache>
+                  <c:formatCode>General</c:formatCode>
+                  <c:ptCount val="5"/>
+                  <c:pt idx="0">
+                    <c:v>8.8473499999999969E-3</c:v>
+                  </c:pt>
+                  <c:pt idx="1">
+                    <c:v>7.1789500000000034E-3</c:v>
+                  </c:pt>
+                  <c:pt idx="2">
+                    <c:v>6.3806399999999999E-3</c:v>
+                  </c:pt>
+                  <c:pt idx="3">
+                    <c:v>6.8563099999999974E-3</c:v>
+                  </c:pt>
+                  <c:pt idx="4">
+                    <c:v>1.1009630000000006E-2</c:v>
+                  </c:pt>
+                </c:numCache>
+              </c:numRef>
+            </c:plus>
+            <c:minus>
+              <c:numRef>
+                <c:f>CVD!$K$14:$K$18</c:f>
+                <c:numCache>
+                  <c:formatCode>General</c:formatCode>
+                  <c:ptCount val="5"/>
+                  <c:pt idx="0">
+                    <c:v>8.8476200000000005E-3</c:v>
+                  </c:pt>
+                  <c:pt idx="1">
+                    <c:v>7.1783100000000002E-3</c:v>
+                  </c:pt>
+                  <c:pt idx="2">
+                    <c:v>6.381349999999994E-3</c:v>
+                  </c:pt>
+                  <c:pt idx="3">
+                    <c:v>6.8560400000000007E-3</c:v>
+                  </c:pt>
+                  <c:pt idx="4">
+                    <c:v>1.1010239999999991E-2</c:v>
+                  </c:pt>
+                </c:numCache>
+              </c:numRef>
+            </c:minus>
+            <c:spPr>
+              <a:noFill/>
+              <a:ln w="9525" cap="flat" cmpd="sng" algn="ctr">
+                <a:solidFill>
+                  <a:schemeClr val="tx1">
+                    <a:lumMod val="65000"/>
+                    <a:lumOff val="35000"/>
+                  </a:schemeClr>
+                </a:solidFill>
+                <a:round/>
+              </a:ln>
+              <a:effectLst/>
+            </c:spPr>
+          </c:errBars>
+          <c:val>
+            <c:numRef>
+              <c:f>CVD!$E$31:$E$35</c:f>
+              <c:numCache>
+                <c:formatCode>0.0%</c:formatCode>
+                <c:ptCount val="5"/>
+                <c:pt idx="0">
+                  <c:v>0.259936</c:v>
+                </c:pt>
+                <c:pt idx="1">
+                  <c:v>0.25090200000000001</c:v>
+                </c:pt>
+                <c:pt idx="2">
+                  <c:v>0.25100299999999998</c:v>
+                </c:pt>
+                <c:pt idx="3">
+                  <c:v>0.23926900000000001</c:v>
+                </c:pt>
+                <c:pt idx="4">
+                  <c:v>0.242397</c:v>
+                </c:pt>
+              </c:numCache>
+            </c:numRef>
+          </c:val>
+          <c:smooth val="0"/>
+          <c:extLst>
+            <c:ext xmlns:c16="http://schemas.microsoft.com/office/drawing/2014/chart" uri="{C3380CC4-5D6E-409C-BE32-E72D297353CC}">
+              <c16:uniqueId val="{00000001-D78E-45D6-9779-46A8999D7A05}"/>
+            </c:ext>
+          </c:extLst>
+        </c:ser>
+        <c:ser>
+          <c:idx val="2"/>
+          <c:order val="1"/>
+          <c:tx>
+            <c:strRef>
+              <c:f>CVD!$D$30</c:f>
+              <c:strCache>
+                <c:ptCount val="1"/>
+                <c:pt idx="0">
+                  <c:v>Without CKD</c:v>
+                </c:pt>
+              </c:strCache>
+            </c:strRef>
+          </c:tx>
+          <c:spPr>
+            <a:ln w="44450" cap="rnd">
+              <a:solidFill>
+                <a:schemeClr val="accent3"/>
+              </a:solidFill>
+              <a:round/>
+            </a:ln>
+            <a:effectLst/>
+          </c:spPr>
+          <c:marker>
+            <c:symbol val="circle"/>
+            <c:size val="5"/>
+            <c:spPr>
+              <a:solidFill>
+                <a:schemeClr val="accent3"/>
+              </a:solidFill>
+              <a:ln w="9525">
+                <a:solidFill>
+                  <a:schemeClr val="accent3"/>
+                </a:solidFill>
+              </a:ln>
+              <a:effectLst/>
+            </c:spPr>
+          </c:marker>
+          <c:errBars>
+            <c:errDir val="y"/>
+            <c:errBarType val="both"/>
+            <c:errValType val="cust"/>
+            <c:noEndCap val="0"/>
+            <c:plus>
+              <c:numRef>
+                <c:f>CVD!$J$19:$J$23</c:f>
+                <c:numCache>
+                  <c:formatCode>General</c:formatCode>
+                  <c:ptCount val="5"/>
+                  <c:pt idx="0">
+                    <c:v>3.0471329999999991E-2</c:v>
+                  </c:pt>
+                  <c:pt idx="1">
+                    <c:v>2.8627260000000015E-2</c:v>
+                  </c:pt>
+                  <c:pt idx="2">
+                    <c:v>2.5103629999999988E-2</c:v>
+                  </c:pt>
+                  <c:pt idx="3">
+                    <c:v>1.9710850000000002E-2</c:v>
+                  </c:pt>
+                  <c:pt idx="4">
+                    <c:v>3.6947649999999999E-2</c:v>
+                  </c:pt>
+                </c:numCache>
+              </c:numRef>
+            </c:plus>
+            <c:minus>
+              <c:numRef>
+                <c:f>CVD!$K$19:$K$23</c:f>
+                <c:numCache>
+                  <c:formatCode>General</c:formatCode>
+                  <c:ptCount val="5"/>
+                  <c:pt idx="0">
+                    <c:v>3.0471670000000006E-2</c:v>
+                  </c:pt>
+                  <c:pt idx="1">
+                    <c:v>2.862764000000001E-2</c:v>
+                  </c:pt>
+                  <c:pt idx="2">
+                    <c:v>2.510404000000005E-2</c:v>
+                  </c:pt>
+                  <c:pt idx="3">
+                    <c:v>1.9711350000000016E-2</c:v>
+                  </c:pt>
+                  <c:pt idx="4">
+                    <c:v>3.6948479999999978E-2</c:v>
+                  </c:pt>
+                </c:numCache>
+              </c:numRef>
+            </c:minus>
+            <c:spPr>
+              <a:noFill/>
+              <a:ln w="9525" cap="flat" cmpd="sng" algn="ctr">
+                <a:solidFill>
+                  <a:schemeClr val="tx1">
+                    <a:lumMod val="65000"/>
+                    <a:lumOff val="35000"/>
+                  </a:schemeClr>
+                </a:solidFill>
+                <a:round/>
+              </a:ln>
+              <a:effectLst/>
+            </c:spPr>
+          </c:errBars>
+          <c:val>
+            <c:numRef>
+              <c:f>CVD!$D$31:$D$35</c:f>
+              <c:numCache>
+                <c:formatCode>0.0%</c:formatCode>
+                <c:ptCount val="5"/>
+                <c:pt idx="0">
+                  <c:v>6.2815999999999997E-2</c:v>
+                </c:pt>
+                <c:pt idx="1">
+                  <c:v>6.1622000000000003E-2</c:v>
+                </c:pt>
+                <c:pt idx="2">
+                  <c:v>5.9589000000000003E-2</c:v>
+                </c:pt>
+                <c:pt idx="3">
+                  <c:v>6.2475999999999997E-2</c:v>
+                </c:pt>
+                <c:pt idx="4">
+                  <c:v>7.8241000000000005E-2</c:v>
+                </c:pt>
+              </c:numCache>
+            </c:numRef>
+          </c:val>
+          <c:smooth val="0"/>
+          <c:extLst>
+            <c:ext xmlns:c16="http://schemas.microsoft.com/office/drawing/2014/chart" uri="{C3380CC4-5D6E-409C-BE32-E72D297353CC}">
+              <c16:uniqueId val="{00000002-D78E-45D6-9779-46A8999D7A05}"/>
+            </c:ext>
+          </c:extLst>
+        </c:ser>
+        <c:ser>
           <c:idx val="0"/>
-          <c:order val="0"/>
+          <c:order val="2"/>
           <c:tx>
             <c:strRef>
               <c:f>CVD!$C$30</c:f>
@@ -306,278 +578,6 @@
           <c:extLst>
             <c:ext xmlns:c16="http://schemas.microsoft.com/office/drawing/2014/chart" uri="{C3380CC4-5D6E-409C-BE32-E72D297353CC}">
               <c16:uniqueId val="{00000000-D78E-45D6-9779-46A8999D7A05}"/>
-            </c:ext>
-          </c:extLst>
-        </c:ser>
-        <c:ser>
-          <c:idx val="1"/>
-          <c:order val="1"/>
-          <c:tx>
-            <c:strRef>
-              <c:f>CVD!$E$30</c:f>
-              <c:strCache>
-                <c:ptCount val="1"/>
-                <c:pt idx="0">
-                  <c:v>CKD</c:v>
-                </c:pt>
-              </c:strCache>
-            </c:strRef>
-          </c:tx>
-          <c:spPr>
-            <a:ln w="44450" cap="rnd">
-              <a:solidFill>
-                <a:schemeClr val="accent2"/>
-              </a:solidFill>
-              <a:round/>
-            </a:ln>
-            <a:effectLst/>
-          </c:spPr>
-          <c:marker>
-            <c:symbol val="circle"/>
-            <c:size val="5"/>
-            <c:spPr>
-              <a:solidFill>
-                <a:schemeClr val="accent2"/>
-              </a:solidFill>
-              <a:ln w="9525">
-                <a:solidFill>
-                  <a:schemeClr val="accent2"/>
-                </a:solidFill>
-              </a:ln>
-              <a:effectLst/>
-            </c:spPr>
-          </c:marker>
-          <c:errBars>
-            <c:errDir val="y"/>
-            <c:errBarType val="both"/>
-            <c:errValType val="cust"/>
-            <c:noEndCap val="0"/>
-            <c:plus>
-              <c:numRef>
-                <c:f>CVD!$J$14:$J$18</c:f>
-                <c:numCache>
-                  <c:formatCode>General</c:formatCode>
-                  <c:ptCount val="5"/>
-                  <c:pt idx="0">
-                    <c:v>8.8473499999999969E-3</c:v>
-                  </c:pt>
-                  <c:pt idx="1">
-                    <c:v>7.1789500000000034E-3</c:v>
-                  </c:pt>
-                  <c:pt idx="2">
-                    <c:v>6.3806399999999999E-3</c:v>
-                  </c:pt>
-                  <c:pt idx="3">
-                    <c:v>6.8563099999999974E-3</c:v>
-                  </c:pt>
-                  <c:pt idx="4">
-                    <c:v>1.1009630000000006E-2</c:v>
-                  </c:pt>
-                </c:numCache>
-              </c:numRef>
-            </c:plus>
-            <c:minus>
-              <c:numRef>
-                <c:f>CVD!$K$14:$K$18</c:f>
-                <c:numCache>
-                  <c:formatCode>General</c:formatCode>
-                  <c:ptCount val="5"/>
-                  <c:pt idx="0">
-                    <c:v>8.8476200000000005E-3</c:v>
-                  </c:pt>
-                  <c:pt idx="1">
-                    <c:v>7.1783100000000002E-3</c:v>
-                  </c:pt>
-                  <c:pt idx="2">
-                    <c:v>6.381349999999994E-3</c:v>
-                  </c:pt>
-                  <c:pt idx="3">
-                    <c:v>6.8560400000000007E-3</c:v>
-                  </c:pt>
-                  <c:pt idx="4">
-                    <c:v>1.1010239999999991E-2</c:v>
-                  </c:pt>
-                </c:numCache>
-              </c:numRef>
-            </c:minus>
-            <c:spPr>
-              <a:noFill/>
-              <a:ln w="9525" cap="flat" cmpd="sng" algn="ctr">
-                <a:solidFill>
-                  <a:schemeClr val="tx1">
-                    <a:lumMod val="65000"/>
-                    <a:lumOff val="35000"/>
-                  </a:schemeClr>
-                </a:solidFill>
-                <a:round/>
-              </a:ln>
-              <a:effectLst/>
-            </c:spPr>
-          </c:errBars>
-          <c:val>
-            <c:numRef>
-              <c:f>CVD!$E$31:$E$35</c:f>
-              <c:numCache>
-                <c:formatCode>0.0%</c:formatCode>
-                <c:ptCount val="5"/>
-                <c:pt idx="0">
-                  <c:v>0.259936</c:v>
-                </c:pt>
-                <c:pt idx="1">
-                  <c:v>0.25090200000000001</c:v>
-                </c:pt>
-                <c:pt idx="2">
-                  <c:v>0.25100299999999998</c:v>
-                </c:pt>
-                <c:pt idx="3">
-                  <c:v>0.23926900000000001</c:v>
-                </c:pt>
-                <c:pt idx="4">
-                  <c:v>0.242397</c:v>
-                </c:pt>
-              </c:numCache>
-            </c:numRef>
-          </c:val>
-          <c:smooth val="0"/>
-          <c:extLst>
-            <c:ext xmlns:c16="http://schemas.microsoft.com/office/drawing/2014/chart" uri="{C3380CC4-5D6E-409C-BE32-E72D297353CC}">
-              <c16:uniqueId val="{00000001-D78E-45D6-9779-46A8999D7A05}"/>
-            </c:ext>
-          </c:extLst>
-        </c:ser>
-        <c:ser>
-          <c:idx val="2"/>
-          <c:order val="2"/>
-          <c:tx>
-            <c:strRef>
-              <c:f>CVD!$D$30</c:f>
-              <c:strCache>
-                <c:ptCount val="1"/>
-                <c:pt idx="0">
-                  <c:v>No CKD</c:v>
-                </c:pt>
-              </c:strCache>
-            </c:strRef>
-          </c:tx>
-          <c:spPr>
-            <a:ln w="44450" cap="rnd">
-              <a:solidFill>
-                <a:schemeClr val="accent3"/>
-              </a:solidFill>
-              <a:round/>
-            </a:ln>
-            <a:effectLst/>
-          </c:spPr>
-          <c:marker>
-            <c:symbol val="circle"/>
-            <c:size val="5"/>
-            <c:spPr>
-              <a:solidFill>
-                <a:schemeClr val="accent3"/>
-              </a:solidFill>
-              <a:ln w="9525">
-                <a:solidFill>
-                  <a:schemeClr val="accent3"/>
-                </a:solidFill>
-              </a:ln>
-              <a:effectLst/>
-            </c:spPr>
-          </c:marker>
-          <c:errBars>
-            <c:errDir val="y"/>
-            <c:errBarType val="both"/>
-            <c:errValType val="cust"/>
-            <c:noEndCap val="0"/>
-            <c:plus>
-              <c:numRef>
-                <c:f>CVD!$J$19:$J$23</c:f>
-                <c:numCache>
-                  <c:formatCode>General</c:formatCode>
-                  <c:ptCount val="5"/>
-                  <c:pt idx="0">
-                    <c:v>3.0471329999999991E-2</c:v>
-                  </c:pt>
-                  <c:pt idx="1">
-                    <c:v>2.8627260000000015E-2</c:v>
-                  </c:pt>
-                  <c:pt idx="2">
-                    <c:v>2.5103629999999988E-2</c:v>
-                  </c:pt>
-                  <c:pt idx="3">
-                    <c:v>1.9710850000000002E-2</c:v>
-                  </c:pt>
-                  <c:pt idx="4">
-                    <c:v>3.6947649999999999E-2</c:v>
-                  </c:pt>
-                </c:numCache>
-              </c:numRef>
-            </c:plus>
-            <c:minus>
-              <c:numRef>
-                <c:f>CVD!$K$19:$K$23</c:f>
-                <c:numCache>
-                  <c:formatCode>General</c:formatCode>
-                  <c:ptCount val="5"/>
-                  <c:pt idx="0">
-                    <c:v>3.0471670000000006E-2</c:v>
-                  </c:pt>
-                  <c:pt idx="1">
-                    <c:v>2.862764000000001E-2</c:v>
-                  </c:pt>
-                  <c:pt idx="2">
-                    <c:v>2.510404000000005E-2</c:v>
-                  </c:pt>
-                  <c:pt idx="3">
-                    <c:v>1.9711350000000016E-2</c:v>
-                  </c:pt>
-                  <c:pt idx="4">
-                    <c:v>3.6948479999999978E-2</c:v>
-                  </c:pt>
-                </c:numCache>
-              </c:numRef>
-            </c:minus>
-            <c:spPr>
-              <a:noFill/>
-              <a:ln w="9525" cap="flat" cmpd="sng" algn="ctr">
-                <a:solidFill>
-                  <a:schemeClr val="tx1">
-                    <a:lumMod val="65000"/>
-                    <a:lumOff val="35000"/>
-                  </a:schemeClr>
-                </a:solidFill>
-                <a:round/>
-              </a:ln>
-              <a:effectLst/>
-            </c:spPr>
-          </c:errBars>
-          <c:val>
-            <c:numRef>
-              <c:f>CVD!$D$31:$D$35</c:f>
-              <c:numCache>
-                <c:formatCode>0.0%</c:formatCode>
-                <c:ptCount val="5"/>
-                <c:pt idx="0">
-                  <c:v>6.2815999999999997E-2</c:v>
-                </c:pt>
-                <c:pt idx="1">
-                  <c:v>6.1622000000000003E-2</c:v>
-                </c:pt>
-                <c:pt idx="2">
-                  <c:v>5.9589000000000003E-2</c:v>
-                </c:pt>
-                <c:pt idx="3">
-                  <c:v>6.2475999999999997E-2</c:v>
-                </c:pt>
-                <c:pt idx="4">
-                  <c:v>7.8241000000000005E-2</c:v>
-                </c:pt>
-              </c:numCache>
-            </c:numRef>
-          </c:val>
-          <c:smooth val="0"/>
-          <c:extLst>
-            <c:ext xmlns:c16="http://schemas.microsoft.com/office/drawing/2014/chart" uri="{C3380CC4-5D6E-409C-BE32-E72D297353CC}">
-              <c16:uniqueId val="{00000002-D78E-45D6-9779-46A8999D7A05}"/>
             </c:ext>
           </c:extLst>
         </c:ser>
@@ -681,8 +681,8 @@
                   </a:defRPr>
                 </a:pPr>
                 <a:r>
-                  <a:rPr lang="en-US"/>
-                  <a:t>% CVD</a:t>
+                  <a:rPr lang="en-US" dirty="0"/>
+                  <a:t>CVD (%)</a:t>
                 </a:r>
               </a:p>
             </c:rich>
@@ -840,8 +840,280 @@
         <c:grouping val="standard"/>
         <c:varyColors val="0"/>
         <c:ser>
+          <c:idx val="1"/>
+          <c:order val="0"/>
+          <c:tx>
+            <c:strRef>
+              <c:f>'CVD (Age Std)'!$E$30</c:f>
+              <c:strCache>
+                <c:ptCount val="1"/>
+                <c:pt idx="0">
+                  <c:v>With CKD</c:v>
+                </c:pt>
+              </c:strCache>
+            </c:strRef>
+          </c:tx>
+          <c:spPr>
+            <a:ln w="44450" cap="rnd">
+              <a:solidFill>
+                <a:schemeClr val="accent2"/>
+              </a:solidFill>
+              <a:round/>
+            </a:ln>
+            <a:effectLst/>
+          </c:spPr>
+          <c:marker>
+            <c:symbol val="circle"/>
+            <c:size val="5"/>
+            <c:spPr>
+              <a:solidFill>
+                <a:schemeClr val="accent2"/>
+              </a:solidFill>
+              <a:ln w="9525">
+                <a:solidFill>
+                  <a:schemeClr val="accent2"/>
+                </a:solidFill>
+              </a:ln>
+              <a:effectLst/>
+            </c:spPr>
+          </c:marker>
+          <c:errBars>
+            <c:errDir val="y"/>
+            <c:errBarType val="both"/>
+            <c:errValType val="cust"/>
+            <c:noEndCap val="0"/>
+            <c:plus>
+              <c:numRef>
+                <c:f>'CVD (Age Std)'!$J$14:$J$18</c:f>
+                <c:numCache>
+                  <c:formatCode>General</c:formatCode>
+                  <c:ptCount val="5"/>
+                  <c:pt idx="0">
+                    <c:v>9.4819199999999909E-3</c:v>
+                  </c:pt>
+                  <c:pt idx="1">
+                    <c:v>8.1522799999999979E-3</c:v>
+                  </c:pt>
+                  <c:pt idx="2">
+                    <c:v>5.5856100000000047E-3</c:v>
+                  </c:pt>
+                  <c:pt idx="3">
+                    <c:v>6.2696899999999944E-3</c:v>
+                  </c:pt>
+                  <c:pt idx="4">
+                    <c:v>9.1127800000000009E-3</c:v>
+                  </c:pt>
+                </c:numCache>
+              </c:numRef>
+            </c:plus>
+            <c:minus>
+              <c:numRef>
+                <c:f>'CVD (Age Std)'!$K$14:$K$18</c:f>
+                <c:numCache>
+                  <c:formatCode>General</c:formatCode>
+                  <c:ptCount val="5"/>
+                  <c:pt idx="0">
+                    <c:v>9.481719999999999E-3</c:v>
+                  </c:pt>
+                  <c:pt idx="1">
+                    <c:v>8.1523500000000026E-3</c:v>
+                  </c:pt>
+                  <c:pt idx="2">
+                    <c:v>5.5848200000000042E-3</c:v>
+                  </c:pt>
+                  <c:pt idx="3">
+                    <c:v>6.270120000000004E-3</c:v>
+                  </c:pt>
+                  <c:pt idx="4">
+                    <c:v>9.1118499999999908E-3</c:v>
+                  </c:pt>
+                </c:numCache>
+              </c:numRef>
+            </c:minus>
+            <c:spPr>
+              <a:noFill/>
+              <a:ln w="9525" cap="flat" cmpd="sng" algn="ctr">
+                <a:solidFill>
+                  <a:schemeClr val="tx1">
+                    <a:lumMod val="65000"/>
+                    <a:lumOff val="35000"/>
+                  </a:schemeClr>
+                </a:solidFill>
+                <a:round/>
+              </a:ln>
+              <a:effectLst/>
+            </c:spPr>
+          </c:errBars>
+          <c:val>
+            <c:numRef>
+              <c:f>'CVD (Age Std)'!$E$31:$E$35</c:f>
+              <c:numCache>
+                <c:formatCode>0.0%</c:formatCode>
+                <c:ptCount val="5"/>
+                <c:pt idx="0">
+                  <c:v>0.15393299999999999</c:v>
+                </c:pt>
+                <c:pt idx="1">
+                  <c:v>0.15023</c:v>
+                </c:pt>
+                <c:pt idx="2">
+                  <c:v>0.14095199999999999</c:v>
+                </c:pt>
+                <c:pt idx="3">
+                  <c:v>0.145203</c:v>
+                </c:pt>
+                <c:pt idx="4">
+                  <c:v>0.144177</c:v>
+                </c:pt>
+              </c:numCache>
+            </c:numRef>
+          </c:val>
+          <c:smooth val="0"/>
+          <c:extLst>
+            <c:ext xmlns:c16="http://schemas.microsoft.com/office/drawing/2014/chart" uri="{C3380CC4-5D6E-409C-BE32-E72D297353CC}">
+              <c16:uniqueId val="{00000001-95C6-4374-A01F-AE1D85E5D876}"/>
+            </c:ext>
+          </c:extLst>
+        </c:ser>
+        <c:ser>
+          <c:idx val="2"/>
+          <c:order val="1"/>
+          <c:tx>
+            <c:strRef>
+              <c:f>'CVD (Age Std)'!$D$30</c:f>
+              <c:strCache>
+                <c:ptCount val="1"/>
+                <c:pt idx="0">
+                  <c:v>Without CKD</c:v>
+                </c:pt>
+              </c:strCache>
+            </c:strRef>
+          </c:tx>
+          <c:spPr>
+            <a:ln w="44450" cap="rnd">
+              <a:solidFill>
+                <a:schemeClr val="accent3"/>
+              </a:solidFill>
+              <a:round/>
+            </a:ln>
+            <a:effectLst/>
+          </c:spPr>
+          <c:marker>
+            <c:symbol val="circle"/>
+            <c:size val="5"/>
+            <c:spPr>
+              <a:solidFill>
+                <a:schemeClr val="accent3"/>
+              </a:solidFill>
+              <a:ln w="9525">
+                <a:solidFill>
+                  <a:schemeClr val="accent3"/>
+                </a:solidFill>
+              </a:ln>
+              <a:effectLst/>
+            </c:spPr>
+          </c:marker>
+          <c:errBars>
+            <c:errDir val="y"/>
+            <c:errBarType val="both"/>
+            <c:errValType val="cust"/>
+            <c:noEndCap val="0"/>
+            <c:plus>
+              <c:numRef>
+                <c:f>'CVD (Age Std)'!$J$19:$J$23</c:f>
+                <c:numCache>
+                  <c:formatCode>General</c:formatCode>
+                  <c:ptCount val="5"/>
+                  <c:pt idx="0">
+                    <c:v>2.2795409999999988E-2</c:v>
+                  </c:pt>
+                  <c:pt idx="1">
+                    <c:v>2.3615080000000011E-2</c:v>
+                  </c:pt>
+                  <c:pt idx="2">
+                    <c:v>1.7752569999999995E-2</c:v>
+                  </c:pt>
+                  <c:pt idx="3">
+                    <c:v>1.3704510000000003E-2</c:v>
+                  </c:pt>
+                  <c:pt idx="4">
+                    <c:v>2.3958750000000001E-2</c:v>
+                  </c:pt>
+                </c:numCache>
+              </c:numRef>
+            </c:plus>
+            <c:minus>
+              <c:numRef>
+                <c:f>'CVD (Age Std)'!$K$19:$K$23</c:f>
+                <c:numCache>
+                  <c:formatCode>General</c:formatCode>
+                  <c:ptCount val="5"/>
+                  <c:pt idx="0">
+                    <c:v>2.2795540000000003E-2</c:v>
+                  </c:pt>
+                  <c:pt idx="1">
+                    <c:v>2.3615959999999991E-2</c:v>
+                  </c:pt>
+                  <c:pt idx="2">
+                    <c:v>1.7753500000000005E-2</c:v>
+                  </c:pt>
+                  <c:pt idx="3">
+                    <c:v>1.370476000000001E-2</c:v>
+                  </c:pt>
+                  <c:pt idx="4">
+                    <c:v>2.3958110000000005E-2</c:v>
+                  </c:pt>
+                </c:numCache>
+              </c:numRef>
+            </c:minus>
+            <c:spPr>
+              <a:noFill/>
+              <a:ln w="9525" cap="flat" cmpd="sng" algn="ctr">
+                <a:solidFill>
+                  <a:schemeClr val="tx1">
+                    <a:lumMod val="65000"/>
+                    <a:lumOff val="35000"/>
+                  </a:schemeClr>
+                </a:solidFill>
+                <a:round/>
+              </a:ln>
+              <a:effectLst/>
+            </c:spPr>
+          </c:errBars>
+          <c:val>
+            <c:numRef>
+              <c:f>'CVD (Age Std)'!$D$31:$D$35</c:f>
+              <c:numCache>
+                <c:formatCode>0.0%</c:formatCode>
+                <c:ptCount val="5"/>
+                <c:pt idx="0">
+                  <c:v>7.9270999999999994E-2</c:v>
+                </c:pt>
+                <c:pt idx="1">
+                  <c:v>7.4177999999999994E-2</c:v>
+                </c:pt>
+                <c:pt idx="2">
+                  <c:v>6.8413000000000002E-2</c:v>
+                </c:pt>
+                <c:pt idx="3">
+                  <c:v>6.9059999999999996E-2</c:v>
+                </c:pt>
+                <c:pt idx="4">
+                  <c:v>8.1143000000000007E-2</c:v>
+                </c:pt>
+              </c:numCache>
+            </c:numRef>
+          </c:val>
+          <c:smooth val="0"/>
+          <c:extLst>
+            <c:ext xmlns:c16="http://schemas.microsoft.com/office/drawing/2014/chart" uri="{C3380CC4-5D6E-409C-BE32-E72D297353CC}">
+              <c16:uniqueId val="{00000002-95C6-4374-A01F-AE1D85E5D876}"/>
+            </c:ext>
+          </c:extLst>
+        </c:ser>
+        <c:ser>
           <c:idx val="0"/>
-          <c:order val="0"/>
+          <c:order val="2"/>
           <c:tx>
             <c:strRef>
               <c:f>'CVD (Age Std)'!$C$30</c:f>
@@ -996,278 +1268,6 @@
           <c:extLst>
             <c:ext xmlns:c16="http://schemas.microsoft.com/office/drawing/2014/chart" uri="{C3380CC4-5D6E-409C-BE32-E72D297353CC}">
               <c16:uniqueId val="{00000000-95C6-4374-A01F-AE1D85E5D876}"/>
-            </c:ext>
-          </c:extLst>
-        </c:ser>
-        <c:ser>
-          <c:idx val="1"/>
-          <c:order val="1"/>
-          <c:tx>
-            <c:strRef>
-              <c:f>'CVD (Age Std)'!$E$30</c:f>
-              <c:strCache>
-                <c:ptCount val="1"/>
-                <c:pt idx="0">
-                  <c:v>CKD</c:v>
-                </c:pt>
-              </c:strCache>
-            </c:strRef>
-          </c:tx>
-          <c:spPr>
-            <a:ln w="44450" cap="rnd">
-              <a:solidFill>
-                <a:schemeClr val="accent2"/>
-              </a:solidFill>
-              <a:round/>
-            </a:ln>
-            <a:effectLst/>
-          </c:spPr>
-          <c:marker>
-            <c:symbol val="circle"/>
-            <c:size val="5"/>
-            <c:spPr>
-              <a:solidFill>
-                <a:schemeClr val="accent2"/>
-              </a:solidFill>
-              <a:ln w="9525">
-                <a:solidFill>
-                  <a:schemeClr val="accent2"/>
-                </a:solidFill>
-              </a:ln>
-              <a:effectLst/>
-            </c:spPr>
-          </c:marker>
-          <c:errBars>
-            <c:errDir val="y"/>
-            <c:errBarType val="both"/>
-            <c:errValType val="cust"/>
-            <c:noEndCap val="0"/>
-            <c:plus>
-              <c:numRef>
-                <c:f>'CVD (Age Std)'!$J$14:$J$18</c:f>
-                <c:numCache>
-                  <c:formatCode>General</c:formatCode>
-                  <c:ptCount val="5"/>
-                  <c:pt idx="0">
-                    <c:v>9.4819199999999909E-3</c:v>
-                  </c:pt>
-                  <c:pt idx="1">
-                    <c:v>8.1522799999999979E-3</c:v>
-                  </c:pt>
-                  <c:pt idx="2">
-                    <c:v>5.5856100000000047E-3</c:v>
-                  </c:pt>
-                  <c:pt idx="3">
-                    <c:v>6.2696899999999944E-3</c:v>
-                  </c:pt>
-                  <c:pt idx="4">
-                    <c:v>9.1127800000000009E-3</c:v>
-                  </c:pt>
-                </c:numCache>
-              </c:numRef>
-            </c:plus>
-            <c:minus>
-              <c:numRef>
-                <c:f>'CVD (Age Std)'!$K$14:$K$18</c:f>
-                <c:numCache>
-                  <c:formatCode>General</c:formatCode>
-                  <c:ptCount val="5"/>
-                  <c:pt idx="0">
-                    <c:v>9.481719999999999E-3</c:v>
-                  </c:pt>
-                  <c:pt idx="1">
-                    <c:v>8.1523500000000026E-3</c:v>
-                  </c:pt>
-                  <c:pt idx="2">
-                    <c:v>5.5848200000000042E-3</c:v>
-                  </c:pt>
-                  <c:pt idx="3">
-                    <c:v>6.270120000000004E-3</c:v>
-                  </c:pt>
-                  <c:pt idx="4">
-                    <c:v>9.1118499999999908E-3</c:v>
-                  </c:pt>
-                </c:numCache>
-              </c:numRef>
-            </c:minus>
-            <c:spPr>
-              <a:noFill/>
-              <a:ln w="9525" cap="flat" cmpd="sng" algn="ctr">
-                <a:solidFill>
-                  <a:schemeClr val="tx1">
-                    <a:lumMod val="65000"/>
-                    <a:lumOff val="35000"/>
-                  </a:schemeClr>
-                </a:solidFill>
-                <a:round/>
-              </a:ln>
-              <a:effectLst/>
-            </c:spPr>
-          </c:errBars>
-          <c:val>
-            <c:numRef>
-              <c:f>'CVD (Age Std)'!$E$31:$E$35</c:f>
-              <c:numCache>
-                <c:formatCode>0.0%</c:formatCode>
-                <c:ptCount val="5"/>
-                <c:pt idx="0">
-                  <c:v>0.15393299999999999</c:v>
-                </c:pt>
-                <c:pt idx="1">
-                  <c:v>0.15023</c:v>
-                </c:pt>
-                <c:pt idx="2">
-                  <c:v>0.14095199999999999</c:v>
-                </c:pt>
-                <c:pt idx="3">
-                  <c:v>0.145203</c:v>
-                </c:pt>
-                <c:pt idx="4">
-                  <c:v>0.144177</c:v>
-                </c:pt>
-              </c:numCache>
-            </c:numRef>
-          </c:val>
-          <c:smooth val="0"/>
-          <c:extLst>
-            <c:ext xmlns:c16="http://schemas.microsoft.com/office/drawing/2014/chart" uri="{C3380CC4-5D6E-409C-BE32-E72D297353CC}">
-              <c16:uniqueId val="{00000001-95C6-4374-A01F-AE1D85E5D876}"/>
-            </c:ext>
-          </c:extLst>
-        </c:ser>
-        <c:ser>
-          <c:idx val="2"/>
-          <c:order val="2"/>
-          <c:tx>
-            <c:strRef>
-              <c:f>'CVD (Age Std)'!$D$30</c:f>
-              <c:strCache>
-                <c:ptCount val="1"/>
-                <c:pt idx="0">
-                  <c:v>No CKD</c:v>
-                </c:pt>
-              </c:strCache>
-            </c:strRef>
-          </c:tx>
-          <c:spPr>
-            <a:ln w="44450" cap="rnd">
-              <a:solidFill>
-                <a:schemeClr val="accent3"/>
-              </a:solidFill>
-              <a:round/>
-            </a:ln>
-            <a:effectLst/>
-          </c:spPr>
-          <c:marker>
-            <c:symbol val="circle"/>
-            <c:size val="5"/>
-            <c:spPr>
-              <a:solidFill>
-                <a:schemeClr val="accent3"/>
-              </a:solidFill>
-              <a:ln w="9525">
-                <a:solidFill>
-                  <a:schemeClr val="accent3"/>
-                </a:solidFill>
-              </a:ln>
-              <a:effectLst/>
-            </c:spPr>
-          </c:marker>
-          <c:errBars>
-            <c:errDir val="y"/>
-            <c:errBarType val="both"/>
-            <c:errValType val="cust"/>
-            <c:noEndCap val="0"/>
-            <c:plus>
-              <c:numRef>
-                <c:f>'CVD (Age Std)'!$J$19:$J$23</c:f>
-                <c:numCache>
-                  <c:formatCode>General</c:formatCode>
-                  <c:ptCount val="5"/>
-                  <c:pt idx="0">
-                    <c:v>2.2795409999999988E-2</c:v>
-                  </c:pt>
-                  <c:pt idx="1">
-                    <c:v>2.3615080000000011E-2</c:v>
-                  </c:pt>
-                  <c:pt idx="2">
-                    <c:v>1.7752569999999995E-2</c:v>
-                  </c:pt>
-                  <c:pt idx="3">
-                    <c:v>1.3704510000000003E-2</c:v>
-                  </c:pt>
-                  <c:pt idx="4">
-                    <c:v>2.3958750000000001E-2</c:v>
-                  </c:pt>
-                </c:numCache>
-              </c:numRef>
-            </c:plus>
-            <c:minus>
-              <c:numRef>
-                <c:f>'CVD (Age Std)'!$K$19:$K$23</c:f>
-                <c:numCache>
-                  <c:formatCode>General</c:formatCode>
-                  <c:ptCount val="5"/>
-                  <c:pt idx="0">
-                    <c:v>2.2795540000000003E-2</c:v>
-                  </c:pt>
-                  <c:pt idx="1">
-                    <c:v>2.3615959999999991E-2</c:v>
-                  </c:pt>
-                  <c:pt idx="2">
-                    <c:v>1.7753500000000005E-2</c:v>
-                  </c:pt>
-                  <c:pt idx="3">
-                    <c:v>1.370476000000001E-2</c:v>
-                  </c:pt>
-                  <c:pt idx="4">
-                    <c:v>2.3958110000000005E-2</c:v>
-                  </c:pt>
-                </c:numCache>
-              </c:numRef>
-            </c:minus>
-            <c:spPr>
-              <a:noFill/>
-              <a:ln w="9525" cap="flat" cmpd="sng" algn="ctr">
-                <a:solidFill>
-                  <a:schemeClr val="tx1">
-                    <a:lumMod val="65000"/>
-                    <a:lumOff val="35000"/>
-                  </a:schemeClr>
-                </a:solidFill>
-                <a:round/>
-              </a:ln>
-              <a:effectLst/>
-            </c:spPr>
-          </c:errBars>
-          <c:val>
-            <c:numRef>
-              <c:f>'CVD (Age Std)'!$D$31:$D$35</c:f>
-              <c:numCache>
-                <c:formatCode>0.0%</c:formatCode>
-                <c:ptCount val="5"/>
-                <c:pt idx="0">
-                  <c:v>7.9270999999999994E-2</c:v>
-                </c:pt>
-                <c:pt idx="1">
-                  <c:v>7.4177999999999994E-2</c:v>
-                </c:pt>
-                <c:pt idx="2">
-                  <c:v>6.8413000000000002E-2</c:v>
-                </c:pt>
-                <c:pt idx="3">
-                  <c:v>6.9059999999999996E-2</c:v>
-                </c:pt>
-                <c:pt idx="4">
-                  <c:v>8.1143000000000007E-2</c:v>
-                </c:pt>
-              </c:numCache>
-            </c:numRef>
-          </c:val>
-          <c:smooth val="0"/>
-          <c:extLst>
-            <c:ext xmlns:c16="http://schemas.microsoft.com/office/drawing/2014/chart" uri="{C3380CC4-5D6E-409C-BE32-E72D297353CC}">
-              <c16:uniqueId val="{00000002-95C6-4374-A01F-AE1D85E5D876}"/>
             </c:ext>
           </c:extLst>
         </c:ser>
@@ -1371,8 +1371,8 @@
                   </a:defRPr>
                 </a:pPr>
                 <a:r>
-                  <a:rPr lang="en-US"/>
-                  <a:t>% CVD</a:t>
+                  <a:rPr lang="en-US" dirty="0"/>
+                  <a:t>CVD (%)</a:t>
                 </a:r>
               </a:p>
             </c:rich>
@@ -1538,7 +1538,7 @@
               <c:strCache>
                 <c:ptCount val="1"/>
                 <c:pt idx="0">
-                  <c:v>18 to 39 years</c:v>
+                  <c:v>18-39 years</c:v>
                 </c:pt>
               </c:strCache>
             </c:strRef>
@@ -1661,7 +1661,7 @@
             <c:numRef>
               <c:f>'Age Strata'!$M$71:$Q$71</c:f>
               <c:numCache>
-                <c:formatCode>General</c:formatCode>
+                <c:formatCode>0.0%</c:formatCode>
                 <c:ptCount val="5"/>
               </c:numCache>
             </c:numRef>
@@ -1682,7 +1682,7 @@
               <c:strCache>
                 <c:ptCount val="1"/>
                 <c:pt idx="0">
-                  <c:v>40 to 59 years</c:v>
+                  <c:v>40-59 years</c:v>
                 </c:pt>
               </c:strCache>
             </c:strRef>
@@ -1841,7 +1841,7 @@
               <c:strCache>
                 <c:ptCount val="1"/>
                 <c:pt idx="0">
-                  <c:v>60 to 69 years</c:v>
+                  <c:v>60-69 years</c:v>
                 </c:pt>
               </c:strCache>
             </c:strRef>
@@ -2250,9 +2250,14 @@
                   </a:defRPr>
                 </a:pPr>
                 <a:r>
-                  <a:rPr lang="en-US"/>
-                  <a:t>% CVD</a:t>
+                  <a:rPr lang="en-US" dirty="0"/>
+                  <a:t>CVD among adults</a:t>
                 </a:r>
+                <a:r>
+                  <a:rPr lang="en-US" baseline="0" dirty="0"/>
+                  <a:t> with CKD (%)</a:t>
+                </a:r>
+                <a:endParaRPr lang="en-US" dirty="0"/>
               </a:p>
             </c:rich>
           </c:tx>
@@ -2830,9 +2835,14 @@
                   </a:defRPr>
                 </a:pPr>
                 <a:r>
-                  <a:rPr lang="en-US"/>
-                  <a:t>% CVD</a:t>
+                  <a:rPr lang="en-US" dirty="0"/>
+                  <a:t>CVD among adults wit</a:t>
                 </a:r>
+                <a:r>
+                  <a:rPr lang="en-US" baseline="0" dirty="0"/>
+                  <a:t>h CKD (%)</a:t>
+                </a:r>
+                <a:endParaRPr lang="en-US" dirty="0"/>
               </a:p>
             </c:rich>
           </c:tx>
@@ -2989,8 +2999,326 @@
         <c:grouping val="standard"/>
         <c:varyColors val="0"/>
         <c:ser>
+          <c:idx val="3"/>
+          <c:order val="0"/>
+          <c:tx>
+            <c:strRef>
+              <c:f>'Race Ethnicity'!$K$74</c:f>
+              <c:strCache>
+                <c:ptCount val="1"/>
+                <c:pt idx="0">
+                  <c:v>Non-Hispanic White</c:v>
+                </c:pt>
+              </c:strCache>
+            </c:strRef>
+          </c:tx>
+          <c:spPr>
+            <a:ln w="44450" cap="rnd">
+              <a:solidFill>
+                <a:schemeClr val="accent4"/>
+              </a:solidFill>
+              <a:round/>
+            </a:ln>
+            <a:effectLst/>
+          </c:spPr>
+          <c:marker>
+            <c:symbol val="circle"/>
+            <c:size val="5"/>
+            <c:spPr>
+              <a:solidFill>
+                <a:schemeClr val="accent4"/>
+              </a:solidFill>
+              <a:ln w="9525">
+                <a:solidFill>
+                  <a:schemeClr val="accent4"/>
+                </a:solidFill>
+              </a:ln>
+              <a:effectLst/>
+            </c:spPr>
+          </c:marker>
+          <c:errBars>
+            <c:errDir val="y"/>
+            <c:errBarType val="both"/>
+            <c:errValType val="cust"/>
+            <c:noEndCap val="0"/>
+            <c:plus>
+              <c:numRef>
+                <c:f>'Race Ethnicity'!$R$83:$V$83</c:f>
+                <c:numCache>
+                  <c:formatCode>General</c:formatCode>
+                  <c:ptCount val="5"/>
+                  <c:pt idx="0">
+                    <c:v>3.7575629999999971E-2</c:v>
+                  </c:pt>
+                  <c:pt idx="1">
+                    <c:v>3.5307529999999976E-2</c:v>
+                  </c:pt>
+                  <c:pt idx="2">
+                    <c:v>3.5478999999999983E-2</c:v>
+                  </c:pt>
+                  <c:pt idx="3">
+                    <c:v>2.8597749999999977E-2</c:v>
+                  </c:pt>
+                  <c:pt idx="4">
+                    <c:v>6.1033119999999996E-2</c:v>
+                  </c:pt>
+                </c:numCache>
+              </c:numRef>
+            </c:plus>
+            <c:minus>
+              <c:numRef>
+                <c:f>'Race Ethnicity'!$R$74:$V$74</c:f>
+                <c:numCache>
+                  <c:formatCode>General</c:formatCode>
+                  <c:ptCount val="5"/>
+                  <c:pt idx="0">
+                    <c:v>3.7575179999999986E-2</c:v>
+                  </c:pt>
+                  <c:pt idx="1">
+                    <c:v>3.5307630000000007E-2</c:v>
+                  </c:pt>
+                  <c:pt idx="2">
+                    <c:v>3.5478700000000002E-2</c:v>
+                  </c:pt>
+                  <c:pt idx="3">
+                    <c:v>2.8597040000000018E-2</c:v>
+                  </c:pt>
+                  <c:pt idx="4">
+                    <c:v>6.1033500000000018E-2</c:v>
+                  </c:pt>
+                </c:numCache>
+              </c:numRef>
+            </c:minus>
+            <c:spPr>
+              <a:noFill/>
+              <a:ln w="9525" cap="flat" cmpd="sng" algn="ctr">
+                <a:solidFill>
+                  <a:schemeClr val="tx1">
+                    <a:lumMod val="65000"/>
+                    <a:lumOff val="35000"/>
+                  </a:schemeClr>
+                </a:solidFill>
+                <a:round/>
+              </a:ln>
+              <a:effectLst/>
+            </c:spPr>
+          </c:errBars>
+          <c:cat>
+            <c:strRef>
+              <c:f>'Race Ethnicity'!$L$70:$P$70</c:f>
+              <c:strCache>
+                <c:ptCount val="5"/>
+                <c:pt idx="0">
+                  <c:v>2001-2004</c:v>
+                </c:pt>
+                <c:pt idx="1">
+                  <c:v>2005-2008</c:v>
+                </c:pt>
+                <c:pt idx="2">
+                  <c:v>2009-2012</c:v>
+                </c:pt>
+                <c:pt idx="3">
+                  <c:v>2013-2016</c:v>
+                </c:pt>
+                <c:pt idx="4">
+                  <c:v>2017-2020</c:v>
+                </c:pt>
+              </c:strCache>
+            </c:strRef>
+          </c:cat>
+          <c:val>
+            <c:numRef>
+              <c:f>'Race Ethnicity'!$L$74:$P$74</c:f>
+              <c:numCache>
+                <c:formatCode>General</c:formatCode>
+                <c:ptCount val="5"/>
+                <c:pt idx="0">
+                  <c:v>0.29130200000000001</c:v>
+                </c:pt>
+                <c:pt idx="1">
+                  <c:v>0.27945500000000001</c:v>
+                </c:pt>
+                <c:pt idx="2">
+                  <c:v>0.28102199999999999</c:v>
+                </c:pt>
+                <c:pt idx="3">
+                  <c:v>0.25664100000000001</c:v>
+                </c:pt>
+                <c:pt idx="4">
+                  <c:v>0.27024300000000001</c:v>
+                </c:pt>
+              </c:numCache>
+            </c:numRef>
+          </c:val>
+          <c:smooth val="0"/>
+          <c:extLst>
+            <c:ext xmlns:c16="http://schemas.microsoft.com/office/drawing/2014/chart" uri="{C3380CC4-5D6E-409C-BE32-E72D297353CC}">
+              <c16:uniqueId val="{00000003-DBD3-4ECE-9C32-F9EFD6745B3E}"/>
+            </c:ext>
+          </c:extLst>
+        </c:ser>
+        <c:ser>
+          <c:idx val="1"/>
+          <c:order val="1"/>
+          <c:tx>
+            <c:strRef>
+              <c:f>'Race Ethnicity'!$K$72</c:f>
+              <c:strCache>
+                <c:ptCount val="1"/>
+                <c:pt idx="0">
+                  <c:v>Non-Hispanic Black</c:v>
+                </c:pt>
+              </c:strCache>
+            </c:strRef>
+          </c:tx>
+          <c:spPr>
+            <a:ln w="44450" cap="rnd">
+              <a:solidFill>
+                <a:schemeClr val="accent2"/>
+              </a:solidFill>
+              <a:round/>
+            </a:ln>
+            <a:effectLst/>
+          </c:spPr>
+          <c:marker>
+            <c:symbol val="circle"/>
+            <c:size val="5"/>
+            <c:spPr>
+              <a:solidFill>
+                <a:schemeClr val="accent2"/>
+              </a:solidFill>
+              <a:ln w="9525">
+                <a:solidFill>
+                  <a:schemeClr val="accent2"/>
+                </a:solidFill>
+              </a:ln>
+              <a:effectLst/>
+            </c:spPr>
+          </c:marker>
+          <c:errBars>
+            <c:errDir val="y"/>
+            <c:errBarType val="both"/>
+            <c:errValType val="cust"/>
+            <c:noEndCap val="0"/>
+            <c:plus>
+              <c:numRef>
+                <c:f>'Race Ethnicity'!$R$81:$V$81</c:f>
+                <c:numCache>
+                  <c:formatCode>General</c:formatCode>
+                  <c:ptCount val="5"/>
+                  <c:pt idx="0">
+                    <c:v>5.0423259999999998E-2</c:v>
+                  </c:pt>
+                  <c:pt idx="1">
+                    <c:v>4.9693889999999963E-2</c:v>
+                  </c:pt>
+                  <c:pt idx="2">
+                    <c:v>2.9714820000000003E-2</c:v>
+                  </c:pt>
+                  <c:pt idx="3">
+                    <c:v>3.621183E-2</c:v>
+                  </c:pt>
+                  <c:pt idx="4">
+                    <c:v>4.1714990000000007E-2</c:v>
+                  </c:pt>
+                </c:numCache>
+              </c:numRef>
+            </c:plus>
+            <c:minus>
+              <c:numRef>
+                <c:f>'Race Ethnicity'!$R$72:$V$72</c:f>
+                <c:numCache>
+                  <c:formatCode>General</c:formatCode>
+                  <c:ptCount val="5"/>
+                  <c:pt idx="0">
+                    <c:v>5.0423970000000012E-2</c:v>
+                  </c:pt>
+                  <c:pt idx="1">
+                    <c:v>4.9693650000000034E-2</c:v>
+                  </c:pt>
+                  <c:pt idx="2">
+                    <c:v>2.9714180000000007E-2</c:v>
+                  </c:pt>
+                  <c:pt idx="3">
+                    <c:v>3.6211820000000006E-2</c:v>
+                  </c:pt>
+                  <c:pt idx="4">
+                    <c:v>4.171532E-2</c:v>
+                  </c:pt>
+                </c:numCache>
+              </c:numRef>
+            </c:minus>
+            <c:spPr>
+              <a:noFill/>
+              <a:ln w="9525" cap="flat" cmpd="sng" algn="ctr">
+                <a:solidFill>
+                  <a:schemeClr val="tx1">
+                    <a:lumMod val="65000"/>
+                    <a:lumOff val="35000"/>
+                  </a:schemeClr>
+                </a:solidFill>
+                <a:round/>
+              </a:ln>
+              <a:effectLst/>
+            </c:spPr>
+          </c:errBars>
+          <c:cat>
+            <c:strRef>
+              <c:f>'Race Ethnicity'!$L$70:$P$70</c:f>
+              <c:strCache>
+                <c:ptCount val="5"/>
+                <c:pt idx="0">
+                  <c:v>2001-2004</c:v>
+                </c:pt>
+                <c:pt idx="1">
+                  <c:v>2005-2008</c:v>
+                </c:pt>
+                <c:pt idx="2">
+                  <c:v>2009-2012</c:v>
+                </c:pt>
+                <c:pt idx="3">
+                  <c:v>2013-2016</c:v>
+                </c:pt>
+                <c:pt idx="4">
+                  <c:v>2017-2020</c:v>
+                </c:pt>
+              </c:strCache>
+            </c:strRef>
+          </c:cat>
+          <c:val>
+            <c:numRef>
+              <c:f>'Race Ethnicity'!$L$72:$P$72</c:f>
+              <c:numCache>
+                <c:formatCode>General</c:formatCode>
+                <c:ptCount val="5"/>
+                <c:pt idx="0">
+                  <c:v>0.244115</c:v>
+                </c:pt>
+                <c:pt idx="1">
+                  <c:v>0.25615900000000003</c:v>
+                </c:pt>
+                <c:pt idx="2">
+                  <c:v>0.20561599999999999</c:v>
+                </c:pt>
+                <c:pt idx="3">
+                  <c:v>0.257469</c:v>
+                </c:pt>
+                <c:pt idx="4">
+                  <c:v>0.23517199999999999</c:v>
+                </c:pt>
+              </c:numCache>
+            </c:numRef>
+          </c:val>
+          <c:smooth val="0"/>
+          <c:extLst>
+            <c:ext xmlns:c16="http://schemas.microsoft.com/office/drawing/2014/chart" uri="{C3380CC4-5D6E-409C-BE32-E72D297353CC}">
+              <c16:uniqueId val="{00000001-DBD3-4ECE-9C32-F9EFD6745B3E}"/>
+            </c:ext>
+          </c:extLst>
+        </c:ser>
+        <c:ser>
           <c:idx val="0"/>
-          <c:order val="0"/>
+          <c:order val="2"/>
           <c:tx>
             <c:strRef>
               <c:f>'Race Ethnicity'!$K$71</c:f>
@@ -3148,174 +3476,15 @@
           </c:extLst>
         </c:ser>
         <c:ser>
-          <c:idx val="1"/>
-          <c:order val="1"/>
-          <c:tx>
-            <c:strRef>
-              <c:f>'Race Ethnicity'!$K$72</c:f>
-              <c:strCache>
-                <c:ptCount val="1"/>
-                <c:pt idx="0">
-                  <c:v>NH Black</c:v>
-                </c:pt>
-              </c:strCache>
-            </c:strRef>
-          </c:tx>
-          <c:spPr>
-            <a:ln w="44450" cap="rnd">
-              <a:solidFill>
-                <a:schemeClr val="accent2"/>
-              </a:solidFill>
-              <a:round/>
-            </a:ln>
-            <a:effectLst/>
-          </c:spPr>
-          <c:marker>
-            <c:symbol val="circle"/>
-            <c:size val="5"/>
-            <c:spPr>
-              <a:solidFill>
-                <a:schemeClr val="accent2"/>
-              </a:solidFill>
-              <a:ln w="9525">
-                <a:solidFill>
-                  <a:schemeClr val="accent2"/>
-                </a:solidFill>
-              </a:ln>
-              <a:effectLst/>
-            </c:spPr>
-          </c:marker>
-          <c:errBars>
-            <c:errDir val="y"/>
-            <c:errBarType val="both"/>
-            <c:errValType val="cust"/>
-            <c:noEndCap val="0"/>
-            <c:plus>
-              <c:numRef>
-                <c:f>'Race Ethnicity'!$R$81:$V$81</c:f>
-                <c:numCache>
-                  <c:formatCode>General</c:formatCode>
-                  <c:ptCount val="5"/>
-                  <c:pt idx="0">
-                    <c:v>5.0423259999999998E-2</c:v>
-                  </c:pt>
-                  <c:pt idx="1">
-                    <c:v>4.9693889999999963E-2</c:v>
-                  </c:pt>
-                  <c:pt idx="2">
-                    <c:v>2.9714820000000003E-2</c:v>
-                  </c:pt>
-                  <c:pt idx="3">
-                    <c:v>3.621183E-2</c:v>
-                  </c:pt>
-                  <c:pt idx="4">
-                    <c:v>4.1714990000000007E-2</c:v>
-                  </c:pt>
-                </c:numCache>
-              </c:numRef>
-            </c:plus>
-            <c:minus>
-              <c:numRef>
-                <c:f>'Race Ethnicity'!$R$72:$V$72</c:f>
-                <c:numCache>
-                  <c:formatCode>General</c:formatCode>
-                  <c:ptCount val="5"/>
-                  <c:pt idx="0">
-                    <c:v>5.0423970000000012E-2</c:v>
-                  </c:pt>
-                  <c:pt idx="1">
-                    <c:v>4.9693650000000034E-2</c:v>
-                  </c:pt>
-                  <c:pt idx="2">
-                    <c:v>2.9714180000000007E-2</c:v>
-                  </c:pt>
-                  <c:pt idx="3">
-                    <c:v>3.6211820000000006E-2</c:v>
-                  </c:pt>
-                  <c:pt idx="4">
-                    <c:v>4.171532E-2</c:v>
-                  </c:pt>
-                </c:numCache>
-              </c:numRef>
-            </c:minus>
-            <c:spPr>
-              <a:noFill/>
-              <a:ln w="9525" cap="flat" cmpd="sng" algn="ctr">
-                <a:solidFill>
-                  <a:schemeClr val="tx1">
-                    <a:lumMod val="65000"/>
-                    <a:lumOff val="35000"/>
-                  </a:schemeClr>
-                </a:solidFill>
-                <a:round/>
-              </a:ln>
-              <a:effectLst/>
-            </c:spPr>
-          </c:errBars>
-          <c:cat>
-            <c:strRef>
-              <c:f>'Race Ethnicity'!$L$70:$P$70</c:f>
-              <c:strCache>
-                <c:ptCount val="5"/>
-                <c:pt idx="0">
-                  <c:v>2001-2004</c:v>
-                </c:pt>
-                <c:pt idx="1">
-                  <c:v>2005-2008</c:v>
-                </c:pt>
-                <c:pt idx="2">
-                  <c:v>2009-2012</c:v>
-                </c:pt>
-                <c:pt idx="3">
-                  <c:v>2013-2016</c:v>
-                </c:pt>
-                <c:pt idx="4">
-                  <c:v>2017-2020</c:v>
-                </c:pt>
-              </c:strCache>
-            </c:strRef>
-          </c:cat>
-          <c:val>
-            <c:numRef>
-              <c:f>'Race Ethnicity'!$L$72:$P$72</c:f>
-              <c:numCache>
-                <c:formatCode>General</c:formatCode>
-                <c:ptCount val="5"/>
-                <c:pt idx="0">
-                  <c:v>0.244115</c:v>
-                </c:pt>
-                <c:pt idx="1">
-                  <c:v>0.25615900000000003</c:v>
-                </c:pt>
-                <c:pt idx="2">
-                  <c:v>0.20561599999999999</c:v>
-                </c:pt>
-                <c:pt idx="3">
-                  <c:v>0.257469</c:v>
-                </c:pt>
-                <c:pt idx="4">
-                  <c:v>0.23517199999999999</c:v>
-                </c:pt>
-              </c:numCache>
-            </c:numRef>
-          </c:val>
-          <c:smooth val="0"/>
-          <c:extLst>
-            <c:ext xmlns:c16="http://schemas.microsoft.com/office/drawing/2014/chart" uri="{C3380CC4-5D6E-409C-BE32-E72D297353CC}">
-              <c16:uniqueId val="{00000001-DBD3-4ECE-9C32-F9EFD6745B3E}"/>
-            </c:ext>
-          </c:extLst>
-        </c:ser>
-        <c:ser>
           <c:idx val="2"/>
-          <c:order val="2"/>
+          <c:order val="3"/>
           <c:tx>
             <c:strRef>
               <c:f>'Race Ethnicity'!$K$73</c:f>
               <c:strCache>
                 <c:ptCount val="1"/>
                 <c:pt idx="0">
-                  <c:v>NH Other</c:v>
+                  <c:v>Other</c:v>
                 </c:pt>
               </c:strCache>
             </c:strRef>
@@ -3456,165 +3625,6 @@
           <c:extLst>
             <c:ext xmlns:c16="http://schemas.microsoft.com/office/drawing/2014/chart" uri="{C3380CC4-5D6E-409C-BE32-E72D297353CC}">
               <c16:uniqueId val="{00000002-DBD3-4ECE-9C32-F9EFD6745B3E}"/>
-            </c:ext>
-          </c:extLst>
-        </c:ser>
-        <c:ser>
-          <c:idx val="3"/>
-          <c:order val="3"/>
-          <c:tx>
-            <c:strRef>
-              <c:f>'Race Ethnicity'!$K$74</c:f>
-              <c:strCache>
-                <c:ptCount val="1"/>
-                <c:pt idx="0">
-                  <c:v>NH White</c:v>
-                </c:pt>
-              </c:strCache>
-            </c:strRef>
-          </c:tx>
-          <c:spPr>
-            <a:ln w="44450" cap="rnd">
-              <a:solidFill>
-                <a:schemeClr val="accent4"/>
-              </a:solidFill>
-              <a:round/>
-            </a:ln>
-            <a:effectLst/>
-          </c:spPr>
-          <c:marker>
-            <c:symbol val="circle"/>
-            <c:size val="5"/>
-            <c:spPr>
-              <a:solidFill>
-                <a:schemeClr val="accent4"/>
-              </a:solidFill>
-              <a:ln w="9525">
-                <a:solidFill>
-                  <a:schemeClr val="accent4"/>
-                </a:solidFill>
-              </a:ln>
-              <a:effectLst/>
-            </c:spPr>
-          </c:marker>
-          <c:errBars>
-            <c:errDir val="y"/>
-            <c:errBarType val="both"/>
-            <c:errValType val="cust"/>
-            <c:noEndCap val="0"/>
-            <c:plus>
-              <c:numRef>
-                <c:f>'Race Ethnicity'!$R$83:$V$83</c:f>
-                <c:numCache>
-                  <c:formatCode>General</c:formatCode>
-                  <c:ptCount val="5"/>
-                  <c:pt idx="0">
-                    <c:v>3.7575629999999971E-2</c:v>
-                  </c:pt>
-                  <c:pt idx="1">
-                    <c:v>3.5307529999999976E-2</c:v>
-                  </c:pt>
-                  <c:pt idx="2">
-                    <c:v>3.5478999999999983E-2</c:v>
-                  </c:pt>
-                  <c:pt idx="3">
-                    <c:v>2.8597749999999977E-2</c:v>
-                  </c:pt>
-                  <c:pt idx="4">
-                    <c:v>6.1033119999999996E-2</c:v>
-                  </c:pt>
-                </c:numCache>
-              </c:numRef>
-            </c:plus>
-            <c:minus>
-              <c:numRef>
-                <c:f>'Race Ethnicity'!$R$74:$V$74</c:f>
-                <c:numCache>
-                  <c:formatCode>General</c:formatCode>
-                  <c:ptCount val="5"/>
-                  <c:pt idx="0">
-                    <c:v>3.7575179999999986E-2</c:v>
-                  </c:pt>
-                  <c:pt idx="1">
-                    <c:v>3.5307630000000007E-2</c:v>
-                  </c:pt>
-                  <c:pt idx="2">
-                    <c:v>3.5478700000000002E-2</c:v>
-                  </c:pt>
-                  <c:pt idx="3">
-                    <c:v>2.8597040000000018E-2</c:v>
-                  </c:pt>
-                  <c:pt idx="4">
-                    <c:v>6.1033500000000018E-2</c:v>
-                  </c:pt>
-                </c:numCache>
-              </c:numRef>
-            </c:minus>
-            <c:spPr>
-              <a:noFill/>
-              <a:ln w="9525" cap="flat" cmpd="sng" algn="ctr">
-                <a:solidFill>
-                  <a:schemeClr val="tx1">
-                    <a:lumMod val="65000"/>
-                    <a:lumOff val="35000"/>
-                  </a:schemeClr>
-                </a:solidFill>
-                <a:round/>
-              </a:ln>
-              <a:effectLst/>
-            </c:spPr>
-          </c:errBars>
-          <c:cat>
-            <c:strRef>
-              <c:f>'Race Ethnicity'!$L$70:$P$70</c:f>
-              <c:strCache>
-                <c:ptCount val="5"/>
-                <c:pt idx="0">
-                  <c:v>2001-2004</c:v>
-                </c:pt>
-                <c:pt idx="1">
-                  <c:v>2005-2008</c:v>
-                </c:pt>
-                <c:pt idx="2">
-                  <c:v>2009-2012</c:v>
-                </c:pt>
-                <c:pt idx="3">
-                  <c:v>2013-2016</c:v>
-                </c:pt>
-                <c:pt idx="4">
-                  <c:v>2017-2020</c:v>
-                </c:pt>
-              </c:strCache>
-            </c:strRef>
-          </c:cat>
-          <c:val>
-            <c:numRef>
-              <c:f>'Race Ethnicity'!$L$74:$P$74</c:f>
-              <c:numCache>
-                <c:formatCode>General</c:formatCode>
-                <c:ptCount val="5"/>
-                <c:pt idx="0">
-                  <c:v>0.29130200000000001</c:v>
-                </c:pt>
-                <c:pt idx="1">
-                  <c:v>0.27945500000000001</c:v>
-                </c:pt>
-                <c:pt idx="2">
-                  <c:v>0.28102199999999999</c:v>
-                </c:pt>
-                <c:pt idx="3">
-                  <c:v>0.25664100000000001</c:v>
-                </c:pt>
-                <c:pt idx="4">
-                  <c:v>0.27024300000000001</c:v>
-                </c:pt>
-              </c:numCache>
-            </c:numRef>
-          </c:val>
-          <c:smooth val="0"/>
-          <c:extLst>
-            <c:ext xmlns:c16="http://schemas.microsoft.com/office/drawing/2014/chart" uri="{C3380CC4-5D6E-409C-BE32-E72D297353CC}">
-              <c16:uniqueId val="{00000003-DBD3-4ECE-9C32-F9EFD6745B3E}"/>
             </c:ext>
           </c:extLst>
         </c:ser>
@@ -3718,9 +3728,14 @@
                   </a:defRPr>
                 </a:pPr>
                 <a:r>
-                  <a:rPr lang="en-US"/>
-                  <a:t>% CVD</a:t>
+                  <a:rPr lang="en-US" sz="2400" dirty="0"/>
+                  <a:t>CVD</a:t>
                 </a:r>
+                <a:r>
+                  <a:rPr lang="en-US" sz="2400" baseline="0" dirty="0"/>
+                  <a:t> among those with CKD (%)</a:t>
+                </a:r>
+                <a:endParaRPr lang="en-US" sz="2400" dirty="0"/>
               </a:p>
             </c:rich>
           </c:tx>
@@ -6935,7 +6950,7 @@
           <a:p>
             <a:fld id="{03F4A4C7-F2E1-4AC2-88AC-896135C15CAD}" type="datetimeFigureOut">
               <a:rPr lang="en-US" smtClean="0"/>
-              <a:t>9/23/2025</a:t>
+              <a:t>1/15/2026</a:t>
             </a:fld>
             <a:endParaRPr lang="en-US"/>
           </a:p>
@@ -7143,7 +7158,7 @@
           <a:p>
             <a:fld id="{03F4A4C7-F2E1-4AC2-88AC-896135C15CAD}" type="datetimeFigureOut">
               <a:rPr lang="en-US" smtClean="0"/>
-              <a:t>9/23/2025</a:t>
+              <a:t>1/15/2026</a:t>
             </a:fld>
             <a:endParaRPr lang="en-US"/>
           </a:p>
@@ -7352,7 +7367,7 @@
           <a:p>
             <a:fld id="{03F4A4C7-F2E1-4AC2-88AC-896135C15CAD}" type="datetimeFigureOut">
               <a:rPr lang="en-US" smtClean="0"/>
-              <a:t>9/23/2025</a:t>
+              <a:t>1/15/2026</a:t>
             </a:fld>
             <a:endParaRPr lang="en-US"/>
           </a:p>
@@ -7667,7 +7682,7 @@
           <a:p>
             <a:fld id="{03F4A4C7-F2E1-4AC2-88AC-896135C15CAD}" type="datetimeFigureOut">
               <a:rPr lang="en-US" smtClean="0"/>
-              <a:t>9/23/2025</a:t>
+              <a:t>1/15/2026</a:t>
             </a:fld>
             <a:endParaRPr lang="en-US"/>
           </a:p>
@@ -7973,7 +7988,7 @@
           <a:p>
             <a:fld id="{03F4A4C7-F2E1-4AC2-88AC-896135C15CAD}" type="datetimeFigureOut">
               <a:rPr lang="en-US" smtClean="0"/>
-              <a:t>9/23/2025</a:t>
+              <a:t>1/15/2026</a:t>
             </a:fld>
             <a:endParaRPr lang="en-US"/>
           </a:p>
@@ -8421,7 +8436,7 @@
           <a:p>
             <a:fld id="{03F4A4C7-F2E1-4AC2-88AC-896135C15CAD}" type="datetimeFigureOut">
               <a:rPr lang="en-US" smtClean="0"/>
-              <a:t>9/23/2025</a:t>
+              <a:t>1/15/2026</a:t>
             </a:fld>
             <a:endParaRPr lang="en-US"/>
           </a:p>
@@ -8603,7 +8618,7 @@
           <a:p>
             <a:fld id="{03F4A4C7-F2E1-4AC2-88AC-896135C15CAD}" type="datetimeFigureOut">
               <a:rPr lang="en-US" smtClean="0"/>
-              <a:t>9/23/2025</a:t>
+              <a:t>1/15/2026</a:t>
             </a:fld>
             <a:endParaRPr lang="en-US"/>
           </a:p>
@@ -8752,7 +8767,7 @@
           <a:p>
             <a:fld id="{03F4A4C7-F2E1-4AC2-88AC-896135C15CAD}" type="datetimeFigureOut">
               <a:rPr lang="en-US" smtClean="0"/>
-              <a:t>9/23/2025</a:t>
+              <a:t>1/15/2026</a:t>
             </a:fld>
             <a:endParaRPr lang="en-US"/>
           </a:p>
@@ -9100,7 +9115,7 @@
           <a:p>
             <a:fld id="{03F4A4C7-F2E1-4AC2-88AC-896135C15CAD}" type="datetimeFigureOut">
               <a:rPr lang="en-US" smtClean="0"/>
-              <a:t>9/23/2025</a:t>
+              <a:t>1/15/2026</a:t>
             </a:fld>
             <a:endParaRPr lang="en-US"/>
           </a:p>
@@ -9428,7 +9443,7 @@
           <a:p>
             <a:fld id="{03F4A4C7-F2E1-4AC2-88AC-896135C15CAD}" type="datetimeFigureOut">
               <a:rPr lang="en-US" smtClean="0"/>
-              <a:t>9/23/2025</a:t>
+              <a:t>1/15/2026</a:t>
             </a:fld>
             <a:endParaRPr lang="en-US"/>
           </a:p>
@@ -9706,7 +9721,7 @@
           <a:p>
             <a:fld id="{03F4A4C7-F2E1-4AC2-88AC-896135C15CAD}" type="datetimeFigureOut">
               <a:rPr lang="en-US" smtClean="0"/>
-              <a:t>9/23/2025</a:t>
+              <a:t>1/15/2026</a:t>
             </a:fld>
             <a:endParaRPr lang="en-US"/>
           </a:p>
@@ -10189,7 +10204,7 @@
                 <a:ea typeface="Open Sans" panose="020B0606030504020204" pitchFamily="34" charset="0"/>
                 <a:cs typeface="Open Sans" panose="020B0606030504020204" pitchFamily="34" charset="0"/>
               </a:rPr>
-              <a:t>During 2001–March 2020, the overall crude prevalence of cardiovascular disease (CVD) ranged from 8.9% to 10.1% and was 3-fold higher among adults with CKD compared to adults without CKD (24.2% vs. 7.8%) in 2017-March 2020. Age-standardized prevalence of CVD was about 2-fold higher in adults with than without CKD. Prevalence of CVD among adults with CKD was higher in older age, among males, and Non-Hispanic White adults.</a:t>
+              <a:t>During 2001–March 2020, the overall crude prevalence of cardiovascular disease (CVD) ranged from 8.9% to 10.1% and was at least threefold higher among adults with CKD compared to adults without CKD across the time periods. Age-standardized prevalence of CVD was about twofold higher in adults with than without CKD. Crude prevalence of CVD among adults with CKD was higher among older, male, and non-Hispanic White adults.</a:t>
             </a:r>
           </a:p>
           <a:p>
@@ -10341,8 +10356,8 @@
           <a:lstStyle/>
           <a:p>
             <a:r>
-              <a:rPr lang="en-US" b="1"/>
-              <a:t>Crude Trends in Prevalence of Cardiovascular Disease, by CKD</a:t>
+              <a:rPr lang="en-US" b="1" dirty="0"/>
+              <a:t>Trends in Prevalence of Cardiovascular Disease by CKD, Crude</a:t>
             </a:r>
           </a:p>
         </p:txBody>
@@ -10359,7 +10374,13 @@
           <p:cNvGraphicFramePr>
             <a:graphicFrameLocks/>
           </p:cNvGraphicFramePr>
-          <p:nvPr/>
+          <p:nvPr>
+            <p:extLst>
+              <p:ext uri="{D42A27DB-BD31-4B8C-83A1-F6EECF244321}">
+                <p14:modId xmlns:p14="http://schemas.microsoft.com/office/powerpoint/2010/main" val="2396132558"/>
+              </p:ext>
+            </p:extLst>
+          </p:nvPr>
         </p:nvGraphicFramePr>
         <p:xfrm>
           <a:off x="381000" y="1690688"/>
@@ -10430,8 +10451,8 @@
           <a:lstStyle/>
           <a:p>
             <a:r>
-              <a:rPr lang="en-US" b="1"/>
-              <a:t>Age-Standardized Trends in Prevalence of Cardiovascular Disease, by CKD</a:t>
+              <a:rPr lang="en-US" b="1" dirty="0"/>
+              <a:t>Trends in Prevalence of Cardiovascular Disease by CKD, Age Standardized</a:t>
             </a:r>
           </a:p>
         </p:txBody>
@@ -10448,10 +10469,16 @@
           <p:cNvGraphicFramePr>
             <a:graphicFrameLocks/>
           </p:cNvGraphicFramePr>
-          <p:nvPr/>
+          <p:nvPr>
+            <p:extLst>
+              <p:ext uri="{D42A27DB-BD31-4B8C-83A1-F6EECF244321}">
+                <p14:modId xmlns:p14="http://schemas.microsoft.com/office/powerpoint/2010/main" val="1013683453"/>
+              </p:ext>
+            </p:extLst>
+          </p:nvPr>
         </p:nvGraphicFramePr>
         <p:xfrm>
-          <a:off x="838200" y="1825625"/>
+          <a:off x="381000" y="1690688"/>
           <a:ext cx="11430000" cy="4572000"/>
         </p:xfrm>
         <a:graphic>
@@ -10519,8 +10546,8 @@
           <a:lstStyle/>
           <a:p>
             <a:r>
-              <a:rPr lang="en-US" b="1"/>
-              <a:t>Crude Trends in Prevalence of Cardiovascular Disease in Adults with CKD, by Age</a:t>
+              <a:rPr lang="en-US" b="1" dirty="0"/>
+              <a:t>Trends in Prevalence of Cardiovascular Disease in Adults with CKD by Age, Crude</a:t>
             </a:r>
           </a:p>
         </p:txBody>
@@ -10537,11 +10564,17 @@
           <p:cNvGraphicFramePr>
             <a:graphicFrameLocks/>
           </p:cNvGraphicFramePr>
-          <p:nvPr/>
+          <p:nvPr>
+            <p:extLst>
+              <p:ext uri="{D42A27DB-BD31-4B8C-83A1-F6EECF244321}">
+                <p14:modId xmlns:p14="http://schemas.microsoft.com/office/powerpoint/2010/main" val="390744275"/>
+              </p:ext>
+            </p:extLst>
+          </p:nvPr>
         </p:nvGraphicFramePr>
         <p:xfrm>
-          <a:off x="838200" y="1825625"/>
-          <a:ext cx="10515600" cy="4351338"/>
+          <a:off x="381000" y="1690688"/>
+          <a:ext cx="11430000" cy="4572000"/>
         </p:xfrm>
         <a:graphic>
           <a:graphicData uri="http://schemas.openxmlformats.org/drawingml/2006/chart">
@@ -10643,8 +10676,8 @@
           <a:lstStyle/>
           <a:p>
             <a:r>
-              <a:rPr lang="en-US" b="1"/>
-              <a:t>Crude Trends in Prevalence of Cardiovascular Disease in Adults with CKD, by Sex</a:t>
+              <a:rPr lang="en-US" b="1" dirty="0"/>
+              <a:t>Trends in Prevalence of Cardiovascular Disease in Adults with CKD by Sex, Crude</a:t>
             </a:r>
           </a:p>
         </p:txBody>
@@ -10661,7 +10694,13 @@
           <p:cNvGraphicFramePr>
             <a:graphicFrameLocks/>
           </p:cNvGraphicFramePr>
-          <p:nvPr/>
+          <p:nvPr>
+            <p:extLst>
+              <p:ext uri="{D42A27DB-BD31-4B8C-83A1-F6EECF244321}">
+                <p14:modId xmlns:p14="http://schemas.microsoft.com/office/powerpoint/2010/main" val="840625374"/>
+              </p:ext>
+            </p:extLst>
+          </p:nvPr>
         </p:nvGraphicFramePr>
         <p:xfrm>
           <a:off x="381000" y="1690688"/>
@@ -10732,8 +10771,8 @@
           <a:lstStyle/>
           <a:p>
             <a:r>
-              <a:rPr lang="en-US" b="1"/>
-              <a:t>Crude Trends in Prevalence of Cardiovascular Disease in Adults with CKD, by Race/Ethnicity</a:t>
+              <a:rPr lang="en-US" b="1" dirty="0"/>
+              <a:t>Trends in Prevalence of Cardiovascular Disease in Adults with CKD by Race/Ethnicity, Crude</a:t>
             </a:r>
           </a:p>
         </p:txBody>
@@ -10750,7 +10789,13 @@
           <p:cNvGraphicFramePr>
             <a:graphicFrameLocks/>
           </p:cNvGraphicFramePr>
-          <p:nvPr/>
+          <p:nvPr>
+            <p:extLst>
+              <p:ext uri="{D42A27DB-BD31-4B8C-83A1-F6EECF244321}">
+                <p14:modId xmlns:p14="http://schemas.microsoft.com/office/powerpoint/2010/main" val="1803120282"/>
+              </p:ext>
+            </p:extLst>
+          </p:nvPr>
         </p:nvGraphicFramePr>
         <p:xfrm>
           <a:off x="381000" y="1690688"/>

--- a/CKDSurveillance/PPT/Q807.pptx
+++ b/CKDSurveillance/PPT/Q807.pptx
@@ -1661,7 +1661,7 @@
             <c:numRef>
               <c:f>'Age Strata'!$M$71:$Q$71</c:f>
               <c:numCache>
-                <c:formatCode>0.0%</c:formatCode>
+                <c:formatCode>General</c:formatCode>
                 <c:ptCount val="5"/>
               </c:numCache>
             </c:numRef>
@@ -6950,7 +6950,7 @@
           <a:p>
             <a:fld id="{03F4A4C7-F2E1-4AC2-88AC-896135C15CAD}" type="datetimeFigureOut">
               <a:rPr lang="en-US" smtClean="0"/>
-              <a:t>1/15/2026</a:t>
+              <a:t>2/11/2026</a:t>
             </a:fld>
             <a:endParaRPr lang="en-US"/>
           </a:p>
@@ -7158,7 +7158,7 @@
           <a:p>
             <a:fld id="{03F4A4C7-F2E1-4AC2-88AC-896135C15CAD}" type="datetimeFigureOut">
               <a:rPr lang="en-US" smtClean="0"/>
-              <a:t>1/15/2026</a:t>
+              <a:t>2/11/2026</a:t>
             </a:fld>
             <a:endParaRPr lang="en-US"/>
           </a:p>
@@ -7367,7 +7367,7 @@
           <a:p>
             <a:fld id="{03F4A4C7-F2E1-4AC2-88AC-896135C15CAD}" type="datetimeFigureOut">
               <a:rPr lang="en-US" smtClean="0"/>
-              <a:t>1/15/2026</a:t>
+              <a:t>2/11/2026</a:t>
             </a:fld>
             <a:endParaRPr lang="en-US"/>
           </a:p>
@@ -7682,7 +7682,7 @@
           <a:p>
             <a:fld id="{03F4A4C7-F2E1-4AC2-88AC-896135C15CAD}" type="datetimeFigureOut">
               <a:rPr lang="en-US" smtClean="0"/>
-              <a:t>1/15/2026</a:t>
+              <a:t>2/11/2026</a:t>
             </a:fld>
             <a:endParaRPr lang="en-US"/>
           </a:p>
@@ -7988,7 +7988,7 @@
           <a:p>
             <a:fld id="{03F4A4C7-F2E1-4AC2-88AC-896135C15CAD}" type="datetimeFigureOut">
               <a:rPr lang="en-US" smtClean="0"/>
-              <a:t>1/15/2026</a:t>
+              <a:t>2/11/2026</a:t>
             </a:fld>
             <a:endParaRPr lang="en-US"/>
           </a:p>
@@ -8436,7 +8436,7 @@
           <a:p>
             <a:fld id="{03F4A4C7-F2E1-4AC2-88AC-896135C15CAD}" type="datetimeFigureOut">
               <a:rPr lang="en-US" smtClean="0"/>
-              <a:t>1/15/2026</a:t>
+              <a:t>2/11/2026</a:t>
             </a:fld>
             <a:endParaRPr lang="en-US"/>
           </a:p>
@@ -8618,7 +8618,7 @@
           <a:p>
             <a:fld id="{03F4A4C7-F2E1-4AC2-88AC-896135C15CAD}" type="datetimeFigureOut">
               <a:rPr lang="en-US" smtClean="0"/>
-              <a:t>1/15/2026</a:t>
+              <a:t>2/11/2026</a:t>
             </a:fld>
             <a:endParaRPr lang="en-US"/>
           </a:p>
@@ -8767,7 +8767,7 @@
           <a:p>
             <a:fld id="{03F4A4C7-F2E1-4AC2-88AC-896135C15CAD}" type="datetimeFigureOut">
               <a:rPr lang="en-US" smtClean="0"/>
-              <a:t>1/15/2026</a:t>
+              <a:t>2/11/2026</a:t>
             </a:fld>
             <a:endParaRPr lang="en-US"/>
           </a:p>
@@ -9115,7 +9115,7 @@
           <a:p>
             <a:fld id="{03F4A4C7-F2E1-4AC2-88AC-896135C15CAD}" type="datetimeFigureOut">
               <a:rPr lang="en-US" smtClean="0"/>
-              <a:t>1/15/2026</a:t>
+              <a:t>2/11/2026</a:t>
             </a:fld>
             <a:endParaRPr lang="en-US"/>
           </a:p>
@@ -9443,7 +9443,7 @@
           <a:p>
             <a:fld id="{03F4A4C7-F2E1-4AC2-88AC-896135C15CAD}" type="datetimeFigureOut">
               <a:rPr lang="en-US" smtClean="0"/>
-              <a:t>1/15/2026</a:t>
+              <a:t>2/11/2026</a:t>
             </a:fld>
             <a:endParaRPr lang="en-US"/>
           </a:p>
@@ -9721,7 +9721,7 @@
           <a:p>
             <a:fld id="{03F4A4C7-F2E1-4AC2-88AC-896135C15CAD}" type="datetimeFigureOut">
               <a:rPr lang="en-US" smtClean="0"/>
-              <a:t>1/15/2026</a:t>
+              <a:t>2/11/2026</a:t>
             </a:fld>
             <a:endParaRPr lang="en-US"/>
           </a:p>
@@ -10612,7 +10612,7 @@
           <a:p>
             <a:r>
               <a:rPr lang="en-US" sz="1200" dirty="0"/>
-              <a:t>Note: Estimates for Age Category "18-39 years" were suppressed due to a large standard error stemming from a small sample size.</a:t>
+              <a:t>Note: Estimates for Age Category “20-39 years" were suppressed due to a large standard error stemming from a small sample size.</a:t>
             </a:r>
           </a:p>
         </p:txBody>

--- a/CKDSurveillance/PPT/Q807.pptx
+++ b/CKDSurveillance/PPT/Q807.pptx
@@ -1661,7 +1661,7 @@
             <c:numRef>
               <c:f>'Age Strata'!$M$71:$Q$71</c:f>
               <c:numCache>
-                <c:formatCode>0.0%</c:formatCode>
+                <c:formatCode>General</c:formatCode>
                 <c:ptCount val="5"/>
               </c:numCache>
             </c:numRef>
@@ -6950,7 +6950,7 @@
           <a:p>
             <a:fld id="{03F4A4C7-F2E1-4AC2-88AC-896135C15CAD}" type="datetimeFigureOut">
               <a:rPr lang="en-US" smtClean="0"/>
-              <a:t>1/15/2026</a:t>
+              <a:t>2/26/2026</a:t>
             </a:fld>
             <a:endParaRPr lang="en-US"/>
           </a:p>
@@ -7158,7 +7158,7 @@
           <a:p>
             <a:fld id="{03F4A4C7-F2E1-4AC2-88AC-896135C15CAD}" type="datetimeFigureOut">
               <a:rPr lang="en-US" smtClean="0"/>
-              <a:t>1/15/2026</a:t>
+              <a:t>2/26/2026</a:t>
             </a:fld>
             <a:endParaRPr lang="en-US"/>
           </a:p>
@@ -7367,7 +7367,7 @@
           <a:p>
             <a:fld id="{03F4A4C7-F2E1-4AC2-88AC-896135C15CAD}" type="datetimeFigureOut">
               <a:rPr lang="en-US" smtClean="0"/>
-              <a:t>1/15/2026</a:t>
+              <a:t>2/26/2026</a:t>
             </a:fld>
             <a:endParaRPr lang="en-US"/>
           </a:p>
@@ -7682,7 +7682,7 @@
           <a:p>
             <a:fld id="{03F4A4C7-F2E1-4AC2-88AC-896135C15CAD}" type="datetimeFigureOut">
               <a:rPr lang="en-US" smtClean="0"/>
-              <a:t>1/15/2026</a:t>
+              <a:t>2/26/2026</a:t>
             </a:fld>
             <a:endParaRPr lang="en-US"/>
           </a:p>
@@ -7988,7 +7988,7 @@
           <a:p>
             <a:fld id="{03F4A4C7-F2E1-4AC2-88AC-896135C15CAD}" type="datetimeFigureOut">
               <a:rPr lang="en-US" smtClean="0"/>
-              <a:t>1/15/2026</a:t>
+              <a:t>2/26/2026</a:t>
             </a:fld>
             <a:endParaRPr lang="en-US"/>
           </a:p>
@@ -8436,7 +8436,7 @@
           <a:p>
             <a:fld id="{03F4A4C7-F2E1-4AC2-88AC-896135C15CAD}" type="datetimeFigureOut">
               <a:rPr lang="en-US" smtClean="0"/>
-              <a:t>1/15/2026</a:t>
+              <a:t>2/26/2026</a:t>
             </a:fld>
             <a:endParaRPr lang="en-US"/>
           </a:p>
@@ -8618,7 +8618,7 @@
           <a:p>
             <a:fld id="{03F4A4C7-F2E1-4AC2-88AC-896135C15CAD}" type="datetimeFigureOut">
               <a:rPr lang="en-US" smtClean="0"/>
-              <a:t>1/15/2026</a:t>
+              <a:t>2/26/2026</a:t>
             </a:fld>
             <a:endParaRPr lang="en-US"/>
           </a:p>
@@ -8767,7 +8767,7 @@
           <a:p>
             <a:fld id="{03F4A4C7-F2E1-4AC2-88AC-896135C15CAD}" type="datetimeFigureOut">
               <a:rPr lang="en-US" smtClean="0"/>
-              <a:t>1/15/2026</a:t>
+              <a:t>2/26/2026</a:t>
             </a:fld>
             <a:endParaRPr lang="en-US"/>
           </a:p>
@@ -9115,7 +9115,7 @@
           <a:p>
             <a:fld id="{03F4A4C7-F2E1-4AC2-88AC-896135C15CAD}" type="datetimeFigureOut">
               <a:rPr lang="en-US" smtClean="0"/>
-              <a:t>1/15/2026</a:t>
+              <a:t>2/26/2026</a:t>
             </a:fld>
             <a:endParaRPr lang="en-US"/>
           </a:p>
@@ -9443,7 +9443,7 @@
           <a:p>
             <a:fld id="{03F4A4C7-F2E1-4AC2-88AC-896135C15CAD}" type="datetimeFigureOut">
               <a:rPr lang="en-US" smtClean="0"/>
-              <a:t>1/15/2026</a:t>
+              <a:t>2/26/2026</a:t>
             </a:fld>
             <a:endParaRPr lang="en-US"/>
           </a:p>
@@ -9721,7 +9721,7 @@
           <a:p>
             <a:fld id="{03F4A4C7-F2E1-4AC2-88AC-896135C15CAD}" type="datetimeFigureOut">
               <a:rPr lang="en-US" smtClean="0"/>
-              <a:t>1/15/2026</a:t>
+              <a:t>2/26/2026</a:t>
             </a:fld>
             <a:endParaRPr lang="en-US"/>
           </a:p>
@@ -10162,7 +10162,18 @@
           <a:p>
             <a:r>
               <a:rPr lang="en-US" sz="4400" b="1" dirty="0"/>
-              <a:t>Trends in Prevalence of Cardiovascular Disease</a:t>
+              <a:t>Trends in Prevalence of </a:t>
+            </a:r>
+            <a:r>
+              <a:rPr lang="en-US" sz="4400" b="1"/>
+              <a:t>Cardiovascular Disease </a:t>
+            </a:r>
+            <a:br>
+              <a:rPr lang="en-US" sz="4400" b="1"/>
+            </a:br>
+            <a:r>
+              <a:rPr lang="en-US" sz="4400" b="1"/>
+              <a:t>by CKD</a:t>
             </a:r>
             <a:endParaRPr lang="en-US" sz="2400" b="1" dirty="0"/>
           </a:p>
@@ -10183,7 +10194,7 @@
         <p:spPr>
           <a:xfrm>
             <a:off x="324666" y="3903231"/>
-            <a:ext cx="11542644" cy="2308324"/>
+            <a:ext cx="11542644" cy="2031325"/>
           </a:xfrm>
           <a:prstGeom prst="rect">
             <a:avLst/>
@@ -10198,13 +10209,21 @@
           <a:p>
             <a:pPr algn="l"/>
             <a:r>
+              <a:rPr lang="en-US" dirty="0">
+                <a:latin typeface="Open Sans" panose="020B0606030504020204" pitchFamily="34" charset="0"/>
+                <a:ea typeface="Open Sans" panose="020B0606030504020204" pitchFamily="34" charset="0"/>
+                <a:cs typeface="Open Sans" panose="020B0606030504020204" pitchFamily="34" charset="0"/>
+              </a:rPr>
+              <a:t>The crude prevalence of cardiovascular disease (CVD) was at least threefold higher among adults with CKD compared to adults without CKD across the time periods. </a:t>
+            </a:r>
+            <a:r>
               <a:rPr lang="en-US" sz="1800" dirty="0">
                 <a:effectLst/>
                 <a:latin typeface="Open Sans" panose="020B0606030504020204" pitchFamily="34" charset="0"/>
                 <a:ea typeface="Open Sans" panose="020B0606030504020204" pitchFamily="34" charset="0"/>
                 <a:cs typeface="Open Sans" panose="020B0606030504020204" pitchFamily="34" charset="0"/>
               </a:rPr>
-              <a:t>During 2001–March 2020, the overall crude prevalence of cardiovascular disease (CVD) ranged from 8.9% to 10.1% and was at least threefold higher among adults with CKD compared to adults without CKD across the time periods. Age-standardized prevalence of CVD was about twofold higher in adults with than without CKD. Crude prevalence of CVD among adults with CKD was higher among older, male, and non-Hispanic White adults.</a:t>
+              <a:t>Age-standardized prevalence of CVD was about twofold higher in adults with than without CKD. Crude prevalence of CVD among adults with CKD was higher among older, male, and non-Hispanic White adults.</a:t>
             </a:r>
           </a:p>
           <a:p>
@@ -10612,7 +10631,7 @@
           <a:p>
             <a:r>
               <a:rPr lang="en-US" sz="1200" dirty="0"/>
-              <a:t>Note: Estimates for Age Category "18-39 years" were suppressed due to a large standard error stemming from a small sample size.</a:t>
+              <a:t>Note: Estimates for Age Category “20-39 years" were suppressed due to a large standard error stemming from a small sample size.</a:t>
             </a:r>
           </a:p>
         </p:txBody>
